--- a/inst/ext/image_insert.pptx
+++ b/inst/ext/image_insert.pptx
@@ -308,7 +308,7 @@
           <a:p>
             <a:fld id="{E6744CE3-0875-4B69-89C0-6F72D8139561}" type="datetimeFigureOut">
               <a:rPr lang="en-GB" smtClean="0"/>
-              <a:t>26/05/2024</a:t>
+              <a:t>08/06/2024</a:t>
             </a:fld>
             <a:endParaRPr lang="en-GB"/>
           </a:p>
@@ -478,7 +478,7 @@
           <a:p>
             <a:fld id="{E6744CE3-0875-4B69-89C0-6F72D8139561}" type="datetimeFigureOut">
               <a:rPr lang="en-GB" smtClean="0"/>
-              <a:t>26/05/2024</a:t>
+              <a:t>08/06/2024</a:t>
             </a:fld>
             <a:endParaRPr lang="en-GB"/>
           </a:p>
@@ -724,7 +724,7 @@
           <a:p>
             <a:fld id="{E6744CE3-0875-4B69-89C0-6F72D8139561}" type="datetimeFigureOut">
               <a:rPr lang="en-GB" smtClean="0"/>
-              <a:t>26/05/2024</a:t>
+              <a:t>08/06/2024</a:t>
             </a:fld>
             <a:endParaRPr lang="en-GB"/>
           </a:p>
@@ -1012,7 +1012,7 @@
           <a:p>
             <a:fld id="{E6744CE3-0875-4B69-89C0-6F72D8139561}" type="datetimeFigureOut">
               <a:rPr lang="en-GB" smtClean="0"/>
-              <a:t>26/05/2024</a:t>
+              <a:t>08/06/2024</a:t>
             </a:fld>
             <a:endParaRPr lang="en-GB"/>
           </a:p>
@@ -1434,7 +1434,7 @@
           <a:p>
             <a:fld id="{E6744CE3-0875-4B69-89C0-6F72D8139561}" type="datetimeFigureOut">
               <a:rPr lang="en-GB" smtClean="0"/>
-              <a:t>26/05/2024</a:t>
+              <a:t>08/06/2024</a:t>
             </a:fld>
             <a:endParaRPr lang="en-GB"/>
           </a:p>
@@ -1552,7 +1552,7 @@
           <a:p>
             <a:fld id="{E6744CE3-0875-4B69-89C0-6F72D8139561}" type="datetimeFigureOut">
               <a:rPr lang="en-GB" smtClean="0"/>
-              <a:t>26/05/2024</a:t>
+              <a:t>08/06/2024</a:t>
             </a:fld>
             <a:endParaRPr lang="en-GB"/>
           </a:p>
@@ -1647,7 +1647,7 @@
           <a:p>
             <a:fld id="{E6744CE3-0875-4B69-89C0-6F72D8139561}" type="datetimeFigureOut">
               <a:rPr lang="en-GB" smtClean="0"/>
-              <a:t>26/05/2024</a:t>
+              <a:t>08/06/2024</a:t>
             </a:fld>
             <a:endParaRPr lang="en-GB"/>
           </a:p>
@@ -1860,7 +1860,7 @@
           <a:p>
             <a:fld id="{E6744CE3-0875-4B69-89C0-6F72D8139561}" type="datetimeFigureOut">
               <a:rPr lang="en-GB" smtClean="0"/>
-              <a:t>26/05/2024</a:t>
+              <a:t>08/06/2024</a:t>
             </a:fld>
             <a:endParaRPr lang="en-GB"/>
           </a:p>
@@ -2419,7 +2419,7 @@
         </p:nvSpPr>
         <p:spPr>
           <a:xfrm>
-            <a:off x="639415" y="4022786"/>
+            <a:off x="625081" y="4137788"/>
             <a:ext cx="3757711" cy="2326840"/>
           </a:xfrm>
           <a:prstGeom prst="rect">
